--- a/slides/decks/s08-neutropenic-fever-bacterial-fungal.pptx
+++ b/slides/decks/s08-neutropenic-fever-bacterial-fungal.pptx
@@ -133,13 +133,13 @@
   <p:extLst>
     <p:ext uri="{521415D9-36F7-43E2-AB2F-B90AF26B5E84}">
       <p14:sectionLst xmlns:p14="http://schemas.microsoft.com/office/powerpoint/2010/main">
-        <p14:section name="Opening" id="{e8ff3822-77b8-aadb-217c-5704920a0ee9}">
+        <p14:section name="Opening" id="{6d6f6620-381f-d2b7-d9eb-ebf6c5108df5}">
           <p14:sldIdLst>
             <p14:sldId id="256"/>
             <p14:sldId id="257"/>
           </p14:sldIdLst>
         </p14:section>
-        <p14:section name="Neutropenic fever" id="{514e748d-55e1-f975-82c0-a6ca3ecdab3e}">
+        <p14:section name="Neutropenic fever" id="{85a1b9e7-5af1-c76e-a047-df54c1f31cc9}">
           <p14:sldIdLst>
             <p14:sldId id="258"/>
             <p14:sldId id="259"/>
@@ -147,7 +147,7 @@
             <p14:sldId id="261"/>
           </p14:sldIdLst>
         </p14:section>
-        <p14:section name="Bacterial infections" id="{2aade11d-8aa2-7d30-57a4-876980c1dec8}">
+        <p14:section name="Bacterial infections" id="{16e98d81-ece4-abde-7fab-59350794233e}">
           <p14:sldIdLst>
             <p14:sldId id="262"/>
             <p14:sldId id="263"/>
@@ -156,7 +156,7 @@
             <p14:sldId id="266"/>
           </p14:sldIdLst>
         </p14:section>
-        <p14:section name="Invasive fungal diseases" id="{ce7cc6bf-9ae7-2406-12e9-c27108f291d6}">
+        <p14:section name="Invasive fungal diseases" id="{32db6f68-15ae-ba6e-ea3a-661d5d70d5a1}">
           <p14:sldIdLst>
             <p14:sldId id="267"/>
             <p14:sldId id="268"/>
@@ -164,7 +164,7 @@
             <p14:sldId id="270"/>
           </p14:sldIdLst>
         </p14:section>
-        <p14:section name="Board questions" id="{ca81e046-598a-cbf6-306e-a0b49a74aa68}">
+        <p14:section name="Board questions" id="{c27c6b29-19ac-2647-3a6b-75e64778cbfa}">
           <p14:sldIdLst>
             <p14:sldId id="271"/>
             <p14:sldId id="272"/>
@@ -174,13 +174,13 @@
             <p14:sldId id="276"/>
           </p14:sldIdLst>
         </p14:section>
-        <p14:section name="References" id="{d9346857-6400-9bd4-e2ae-3f6aa5acb186}">
+        <p14:section name="References" id="{114635b7-ef10-b98e-071f-2a79f5512935}">
           <p14:sldIdLst>
             <p14:sldId id="277"/>
             <p14:sldId id="278"/>
           </p14:sldIdLst>
         </p14:section>
-        <p14:section name="Backup" id="{871a73d9-ee64-05fe-b6d7-2c747642a1b9}">
+        <p14:section name="Backup" id="{f228f685-cb5a-76cc-e3a5-5286c957d824}">
           <p14:sldIdLst>
             <p14:sldId id="279"/>
             <p14:sldId id="280"/>
